--- a/Project/docs/1907057.pptx
+++ b/Project/docs/1907057.pptx
@@ -141,7 +141,7 @@
       <p15:sldGuideLst xmlns:p15="http://schemas.microsoft.com/office/powerpoint/2012/main"/>
     </p:ext>
     <p:ext uri="GoogleSlidesCustomDataVersion2">
-      <go:slidesCustomData xmlns="" xmlns:mc="http://schemas.openxmlformats.org/markup-compatibility/2006" xmlns:mv="urn:schemas-microsoft-com:mac:vml" xmlns:c="http://schemas.openxmlformats.org/drawingml/2006/chart" xmlns:dgm="http://schemas.openxmlformats.org/drawingml/2006/diagram" xmlns:o="urn:schemas-microsoft-com:office:office" xmlns:v="urn:schemas-microsoft-com:vml" xmlns:pvml="urn:schemas-microsoft-com:office:powerpoint" xmlns:com="http://schemas.openxmlformats.org/drawingml/2006/compatibility" xmlns:p14="http://schemas.microsoft.com/office/powerpoint/2010/main" xmlns:p15="http://schemas.microsoft.com/office/powerpoint/2012/main" xmlns:ahyp="http://schemas.microsoft.com/office/drawing/2018/hyperlinkcolor" xmlns:go="http://customooxmlschemas.google.com/" r:id="rId40" roundtripDataSignature="AMtx7miFGE4Z3Pd82HUBysMENlH/UrNdGQ=="/>
+      <go:slidesCustomData xmlns:go="http://customooxmlschemas.google.com/" xmlns:ahyp="http://schemas.microsoft.com/office/drawing/2018/hyperlinkcolor" xmlns:p15="http://schemas.microsoft.com/office/powerpoint/2012/main" xmlns:p14="http://schemas.microsoft.com/office/powerpoint/2010/main" xmlns:com="http://schemas.openxmlformats.org/drawingml/2006/compatibility" xmlns:pvml="urn:schemas-microsoft-com:office:powerpoint" xmlns:v="urn:schemas-microsoft-com:vml" xmlns:o="urn:schemas-microsoft-com:office:office" xmlns:dgm="http://schemas.openxmlformats.org/drawingml/2006/diagram" xmlns:c="http://schemas.openxmlformats.org/drawingml/2006/chart" xmlns:mv="urn:schemas-microsoft-com:mac:vml" xmlns:mc="http://schemas.openxmlformats.org/markup-compatibility/2006" xmlns="" r:id="rId40" roundtripDataSignature="AMtx7miFGE4Z3Pd82HUBysMENlH/UrNdGQ=="/>
     </p:ext>
   </p:extLst>
 </p:presentation>
@@ -1446,10 +1446,6 @@
               </a:spcAft>
               <a:buNone/>
             </a:pPr>
-            <a:r>
-              <a:rPr lang="en-GB" dirty="0"/>
-              <a:t>Add figure in methodology and update recommendations and findings</a:t>
-            </a:r>
             <a:endParaRPr dirty="0"/>
           </a:p>
         </p:txBody>
@@ -10631,113 +10627,6 @@
       </p:sp>
       <p:sp>
         <p:nvSpPr>
-          <p:cNvPr id="153" name="Google Shape;153;p3"/>
-          <p:cNvSpPr txBox="1">
-            <a:spLocks noGrp="1"/>
-          </p:cNvSpPr>
-          <p:nvPr>
-            <p:ph type="sldNum" idx="12"/>
-          </p:nvPr>
-        </p:nvSpPr>
-        <p:spPr>
-          <a:xfrm>
-            <a:off x="5818505" y="6447982"/>
-            <a:ext cx="523240" cy="247651"/>
-          </a:xfrm>
-          <a:prstGeom prst="rect">
-            <a:avLst/>
-          </a:prstGeom>
-          <a:noFill/>
-          <a:ln>
-            <a:noFill/>
-          </a:ln>
-        </p:spPr>
-        <p:txBody>
-          <a:bodyPr spcFirstLastPara="1" wrap="square" lIns="0" tIns="0" rIns="0" bIns="0" anchor="t" anchorCtr="0">
-            <a:noAutofit/>
-          </a:bodyPr>
-          <a:lstStyle/>
-          <a:p>
-            <a:pPr marL="0" lvl="0" indent="0" algn="ctr" rtl="0">
-              <a:spcBef>
-                <a:spcPts val="0"/>
-              </a:spcBef>
-              <a:spcAft>
-                <a:spcPts val="0"/>
-              </a:spcAft>
-              <a:buNone/>
-            </a:pPr>
-            <a:r>
-              <a:rPr lang="en-US" dirty="0"/>
-              <a:t>3</a:t>
-            </a:r>
-            <a:endParaRPr dirty="0">
-              <a:latin typeface="Libre Franklin"/>
-              <a:ea typeface="Libre Franklin"/>
-              <a:cs typeface="Libre Franklin"/>
-              <a:sym typeface="Libre Franklin"/>
-            </a:endParaRPr>
-          </a:p>
-        </p:txBody>
-      </p:sp>
-      <p:sp>
-        <p:nvSpPr>
-          <p:cNvPr id="152" name="Google Shape;152;p3"/>
-          <p:cNvSpPr txBox="1">
-            <a:spLocks noGrp="1"/>
-          </p:cNvSpPr>
-          <p:nvPr>
-            <p:ph type="dt" idx="10"/>
-          </p:nvPr>
-        </p:nvSpPr>
-        <p:spPr>
-          <a:xfrm>
-            <a:off x="10253345" y="6447981"/>
-            <a:ext cx="1313180" cy="247651"/>
-          </a:xfrm>
-          <a:prstGeom prst="rect">
-            <a:avLst/>
-          </a:prstGeom>
-          <a:noFill/>
-          <a:ln>
-            <a:noFill/>
-          </a:ln>
-        </p:spPr>
-        <p:txBody>
-          <a:bodyPr spcFirstLastPara="1" wrap="square" lIns="0" tIns="0" rIns="0" bIns="0" anchor="t" anchorCtr="0">
-            <a:noAutofit/>
-          </a:bodyPr>
-          <a:lstStyle/>
-          <a:p>
-            <a:pPr marL="0" lvl="0" indent="0" algn="r" rtl="0">
-              <a:spcBef>
-                <a:spcPts val="0"/>
-              </a:spcBef>
-              <a:spcAft>
-                <a:spcPts val="0"/>
-              </a:spcAft>
-              <a:buNone/>
-            </a:pPr>
-            <a:r>
-              <a:rPr lang="en-US" dirty="0">
-                <a:latin typeface="Libre Franklin"/>
-                <a:ea typeface="Libre Franklin"/>
-                <a:cs typeface="Libre Franklin"/>
-                <a:sym typeface="Libre Franklin"/>
-              </a:rPr>
-              <a:t> 5/6/2024</a:t>
-            </a:r>
-            <a:endParaRPr dirty="0">
-              <a:latin typeface="Libre Franklin"/>
-              <a:ea typeface="Libre Franklin"/>
-              <a:cs typeface="Libre Franklin"/>
-              <a:sym typeface="Libre Franklin"/>
-            </a:endParaRPr>
-          </a:p>
-        </p:txBody>
-      </p:sp>
-      <p:sp>
-        <p:nvSpPr>
           <p:cNvPr id="154" name="Google Shape;154;p3"/>
           <p:cNvSpPr txBox="1"/>
           <p:nvPr/>
@@ -11461,113 +11350,6 @@
       </p:sp>
       <p:sp>
         <p:nvSpPr>
-          <p:cNvPr id="153" name="Google Shape;153;p3"/>
-          <p:cNvSpPr txBox="1">
-            <a:spLocks noGrp="1"/>
-          </p:cNvSpPr>
-          <p:nvPr>
-            <p:ph type="sldNum" idx="12"/>
-          </p:nvPr>
-        </p:nvSpPr>
-        <p:spPr>
-          <a:xfrm>
-            <a:off x="5818505" y="6447982"/>
-            <a:ext cx="523240" cy="247651"/>
-          </a:xfrm>
-          <a:prstGeom prst="rect">
-            <a:avLst/>
-          </a:prstGeom>
-          <a:noFill/>
-          <a:ln>
-            <a:noFill/>
-          </a:ln>
-        </p:spPr>
-        <p:txBody>
-          <a:bodyPr spcFirstLastPara="1" wrap="square" lIns="0" tIns="0" rIns="0" bIns="0" anchor="t" anchorCtr="0">
-            <a:noAutofit/>
-          </a:bodyPr>
-          <a:lstStyle/>
-          <a:p>
-            <a:pPr marL="0" lvl="0" indent="0" algn="ctr" rtl="0">
-              <a:spcBef>
-                <a:spcPts val="0"/>
-              </a:spcBef>
-              <a:spcAft>
-                <a:spcPts val="0"/>
-              </a:spcAft>
-              <a:buNone/>
-            </a:pPr>
-            <a:r>
-              <a:rPr lang="en-US" dirty="0"/>
-              <a:t>3</a:t>
-            </a:r>
-            <a:endParaRPr dirty="0">
-              <a:latin typeface="Libre Franklin"/>
-              <a:ea typeface="Libre Franklin"/>
-              <a:cs typeface="Libre Franklin"/>
-              <a:sym typeface="Libre Franklin"/>
-            </a:endParaRPr>
-          </a:p>
-        </p:txBody>
-      </p:sp>
-      <p:sp>
-        <p:nvSpPr>
-          <p:cNvPr id="152" name="Google Shape;152;p3"/>
-          <p:cNvSpPr txBox="1">
-            <a:spLocks noGrp="1"/>
-          </p:cNvSpPr>
-          <p:nvPr>
-            <p:ph type="dt" idx="10"/>
-          </p:nvPr>
-        </p:nvSpPr>
-        <p:spPr>
-          <a:xfrm>
-            <a:off x="10253345" y="6447981"/>
-            <a:ext cx="1313180" cy="247651"/>
-          </a:xfrm>
-          <a:prstGeom prst="rect">
-            <a:avLst/>
-          </a:prstGeom>
-          <a:noFill/>
-          <a:ln>
-            <a:noFill/>
-          </a:ln>
-        </p:spPr>
-        <p:txBody>
-          <a:bodyPr spcFirstLastPara="1" wrap="square" lIns="0" tIns="0" rIns="0" bIns="0" anchor="t" anchorCtr="0">
-            <a:noAutofit/>
-          </a:bodyPr>
-          <a:lstStyle/>
-          <a:p>
-            <a:pPr marL="0" lvl="0" indent="0" algn="r" rtl="0">
-              <a:spcBef>
-                <a:spcPts val="0"/>
-              </a:spcBef>
-              <a:spcAft>
-                <a:spcPts val="0"/>
-              </a:spcAft>
-              <a:buNone/>
-            </a:pPr>
-            <a:r>
-              <a:rPr lang="en-US" dirty="0">
-                <a:latin typeface="Libre Franklin"/>
-                <a:ea typeface="Libre Franklin"/>
-                <a:cs typeface="Libre Franklin"/>
-                <a:sym typeface="Libre Franklin"/>
-              </a:rPr>
-              <a:t> 5/6/2024</a:t>
-            </a:r>
-            <a:endParaRPr dirty="0">
-              <a:latin typeface="Libre Franklin"/>
-              <a:ea typeface="Libre Franklin"/>
-              <a:cs typeface="Libre Franklin"/>
-              <a:sym typeface="Libre Franklin"/>
-            </a:endParaRPr>
-          </a:p>
-        </p:txBody>
-      </p:sp>
-      <p:sp>
-        <p:nvSpPr>
           <p:cNvPr id="154" name="Google Shape;154;p3"/>
           <p:cNvSpPr txBox="1"/>
           <p:nvPr/>
@@ -12233,113 +12015,6 @@
             <a:endParaRPr sz="4000" dirty="0">
               <a:latin typeface="Times New Roman" panose="02020603050405020304" pitchFamily="18" charset="0"/>
               <a:cs typeface="Times New Roman" panose="02020603050405020304" pitchFamily="18" charset="0"/>
-            </a:endParaRPr>
-          </a:p>
-        </p:txBody>
-      </p:sp>
-      <p:sp>
-        <p:nvSpPr>
-          <p:cNvPr id="153" name="Google Shape;153;p3"/>
-          <p:cNvSpPr txBox="1">
-            <a:spLocks noGrp="1"/>
-          </p:cNvSpPr>
-          <p:nvPr>
-            <p:ph type="sldNum" idx="12"/>
-          </p:nvPr>
-        </p:nvSpPr>
-        <p:spPr>
-          <a:xfrm>
-            <a:off x="5818505" y="6447982"/>
-            <a:ext cx="523240" cy="247651"/>
-          </a:xfrm>
-          <a:prstGeom prst="rect">
-            <a:avLst/>
-          </a:prstGeom>
-          <a:noFill/>
-          <a:ln>
-            <a:noFill/>
-          </a:ln>
-        </p:spPr>
-        <p:txBody>
-          <a:bodyPr spcFirstLastPara="1" wrap="square" lIns="0" tIns="0" rIns="0" bIns="0" anchor="t" anchorCtr="0">
-            <a:noAutofit/>
-          </a:bodyPr>
-          <a:lstStyle/>
-          <a:p>
-            <a:pPr marL="0" lvl="0" indent="0" algn="ctr" rtl="0">
-              <a:spcBef>
-                <a:spcPts val="0"/>
-              </a:spcBef>
-              <a:spcAft>
-                <a:spcPts val="0"/>
-              </a:spcAft>
-              <a:buNone/>
-            </a:pPr>
-            <a:r>
-              <a:rPr lang="en-US" dirty="0"/>
-              <a:t>3</a:t>
-            </a:r>
-            <a:endParaRPr dirty="0">
-              <a:latin typeface="Libre Franklin"/>
-              <a:ea typeface="Libre Franklin"/>
-              <a:cs typeface="Libre Franklin"/>
-              <a:sym typeface="Libre Franklin"/>
-            </a:endParaRPr>
-          </a:p>
-        </p:txBody>
-      </p:sp>
-      <p:sp>
-        <p:nvSpPr>
-          <p:cNvPr id="152" name="Google Shape;152;p3"/>
-          <p:cNvSpPr txBox="1">
-            <a:spLocks noGrp="1"/>
-          </p:cNvSpPr>
-          <p:nvPr>
-            <p:ph type="dt" idx="10"/>
-          </p:nvPr>
-        </p:nvSpPr>
-        <p:spPr>
-          <a:xfrm>
-            <a:off x="10253345" y="6447981"/>
-            <a:ext cx="1313180" cy="247651"/>
-          </a:xfrm>
-          <a:prstGeom prst="rect">
-            <a:avLst/>
-          </a:prstGeom>
-          <a:noFill/>
-          <a:ln>
-            <a:noFill/>
-          </a:ln>
-        </p:spPr>
-        <p:txBody>
-          <a:bodyPr spcFirstLastPara="1" wrap="square" lIns="0" tIns="0" rIns="0" bIns="0" anchor="t" anchorCtr="0">
-            <a:noAutofit/>
-          </a:bodyPr>
-          <a:lstStyle/>
-          <a:p>
-            <a:pPr marL="0" lvl="0" indent="0" algn="r" rtl="0">
-              <a:spcBef>
-                <a:spcPts val="0"/>
-              </a:spcBef>
-              <a:spcAft>
-                <a:spcPts val="0"/>
-              </a:spcAft>
-              <a:buNone/>
-            </a:pPr>
-            <a:r>
-              <a:rPr lang="en-US" dirty="0">
-                <a:latin typeface="Libre Franklin"/>
-                <a:ea typeface="Libre Franklin"/>
-                <a:cs typeface="Libre Franklin"/>
-                <a:sym typeface="Libre Franklin"/>
-              </a:rPr>
-              <a:t> 5/6/2024</a:t>
-            </a:r>
-            <a:endParaRPr dirty="0">
-              <a:latin typeface="Libre Franklin"/>
-              <a:ea typeface="Libre Franklin"/>
-              <a:cs typeface="Libre Franklin"/>
-              <a:sym typeface="Libre Franklin"/>
             </a:endParaRPr>
           </a:p>
         </p:txBody>
@@ -13012,113 +12687,6 @@
             <a:endParaRPr sz="4000" dirty="0">
               <a:latin typeface="Times New Roman" panose="02020603050405020304" pitchFamily="18" charset="0"/>
               <a:cs typeface="Times New Roman" panose="02020603050405020304" pitchFamily="18" charset="0"/>
-            </a:endParaRPr>
-          </a:p>
-        </p:txBody>
-      </p:sp>
-      <p:sp>
-        <p:nvSpPr>
-          <p:cNvPr id="153" name="Google Shape;153;p3"/>
-          <p:cNvSpPr txBox="1">
-            <a:spLocks noGrp="1"/>
-          </p:cNvSpPr>
-          <p:nvPr>
-            <p:ph type="sldNum" idx="12"/>
-          </p:nvPr>
-        </p:nvSpPr>
-        <p:spPr>
-          <a:xfrm>
-            <a:off x="5818505" y="6447982"/>
-            <a:ext cx="523240" cy="247651"/>
-          </a:xfrm>
-          <a:prstGeom prst="rect">
-            <a:avLst/>
-          </a:prstGeom>
-          <a:noFill/>
-          <a:ln>
-            <a:noFill/>
-          </a:ln>
-        </p:spPr>
-        <p:txBody>
-          <a:bodyPr spcFirstLastPara="1" wrap="square" lIns="0" tIns="0" rIns="0" bIns="0" anchor="t" anchorCtr="0">
-            <a:noAutofit/>
-          </a:bodyPr>
-          <a:lstStyle/>
-          <a:p>
-            <a:pPr marL="0" lvl="0" indent="0" algn="ctr" rtl="0">
-              <a:spcBef>
-                <a:spcPts val="0"/>
-              </a:spcBef>
-              <a:spcAft>
-                <a:spcPts val="0"/>
-              </a:spcAft>
-              <a:buNone/>
-            </a:pPr>
-            <a:r>
-              <a:rPr lang="en-US" dirty="0"/>
-              <a:t>3</a:t>
-            </a:r>
-            <a:endParaRPr dirty="0">
-              <a:latin typeface="Libre Franklin"/>
-              <a:ea typeface="Libre Franklin"/>
-              <a:cs typeface="Libre Franklin"/>
-              <a:sym typeface="Libre Franklin"/>
-            </a:endParaRPr>
-          </a:p>
-        </p:txBody>
-      </p:sp>
-      <p:sp>
-        <p:nvSpPr>
-          <p:cNvPr id="152" name="Google Shape;152;p3"/>
-          <p:cNvSpPr txBox="1">
-            <a:spLocks noGrp="1"/>
-          </p:cNvSpPr>
-          <p:nvPr>
-            <p:ph type="dt" idx="10"/>
-          </p:nvPr>
-        </p:nvSpPr>
-        <p:spPr>
-          <a:xfrm>
-            <a:off x="10253345" y="6447981"/>
-            <a:ext cx="1313180" cy="247651"/>
-          </a:xfrm>
-          <a:prstGeom prst="rect">
-            <a:avLst/>
-          </a:prstGeom>
-          <a:noFill/>
-          <a:ln>
-            <a:noFill/>
-          </a:ln>
-        </p:spPr>
-        <p:txBody>
-          <a:bodyPr spcFirstLastPara="1" wrap="square" lIns="0" tIns="0" rIns="0" bIns="0" anchor="t" anchorCtr="0">
-            <a:noAutofit/>
-          </a:bodyPr>
-          <a:lstStyle/>
-          <a:p>
-            <a:pPr marL="0" lvl="0" indent="0" algn="r" rtl="0">
-              <a:spcBef>
-                <a:spcPts val="0"/>
-              </a:spcBef>
-              <a:spcAft>
-                <a:spcPts val="0"/>
-              </a:spcAft>
-              <a:buNone/>
-            </a:pPr>
-            <a:r>
-              <a:rPr lang="en-US" dirty="0">
-                <a:latin typeface="Libre Franklin"/>
-                <a:ea typeface="Libre Franklin"/>
-                <a:cs typeface="Libre Franklin"/>
-                <a:sym typeface="Libre Franklin"/>
-              </a:rPr>
-              <a:t> 5/6/2024</a:t>
-            </a:r>
-            <a:endParaRPr dirty="0">
-              <a:latin typeface="Libre Franklin"/>
-              <a:ea typeface="Libre Franklin"/>
-              <a:cs typeface="Libre Franklin"/>
-              <a:sym typeface="Libre Franklin"/>
             </a:endParaRPr>
           </a:p>
         </p:txBody>
@@ -14125,113 +13693,6 @@
       </p:sp>
       <p:sp>
         <p:nvSpPr>
-          <p:cNvPr id="153" name="Google Shape;153;p3"/>
-          <p:cNvSpPr txBox="1">
-            <a:spLocks noGrp="1"/>
-          </p:cNvSpPr>
-          <p:nvPr>
-            <p:ph type="sldNum" idx="12"/>
-          </p:nvPr>
-        </p:nvSpPr>
-        <p:spPr>
-          <a:xfrm>
-            <a:off x="5818505" y="6447982"/>
-            <a:ext cx="523240" cy="247651"/>
-          </a:xfrm>
-          <a:prstGeom prst="rect">
-            <a:avLst/>
-          </a:prstGeom>
-          <a:noFill/>
-          <a:ln>
-            <a:noFill/>
-          </a:ln>
-        </p:spPr>
-        <p:txBody>
-          <a:bodyPr spcFirstLastPara="1" wrap="square" lIns="0" tIns="0" rIns="0" bIns="0" anchor="t" anchorCtr="0">
-            <a:noAutofit/>
-          </a:bodyPr>
-          <a:lstStyle/>
-          <a:p>
-            <a:pPr marL="0" lvl="0" indent="0" algn="ctr" rtl="0">
-              <a:spcBef>
-                <a:spcPts val="0"/>
-              </a:spcBef>
-              <a:spcAft>
-                <a:spcPts val="0"/>
-              </a:spcAft>
-              <a:buNone/>
-            </a:pPr>
-            <a:r>
-              <a:rPr lang="en-US" dirty="0"/>
-              <a:t>3</a:t>
-            </a:r>
-            <a:endParaRPr dirty="0">
-              <a:latin typeface="Libre Franklin"/>
-              <a:ea typeface="Libre Franklin"/>
-              <a:cs typeface="Libre Franklin"/>
-              <a:sym typeface="Libre Franklin"/>
-            </a:endParaRPr>
-          </a:p>
-        </p:txBody>
-      </p:sp>
-      <p:sp>
-        <p:nvSpPr>
-          <p:cNvPr id="152" name="Google Shape;152;p3"/>
-          <p:cNvSpPr txBox="1">
-            <a:spLocks noGrp="1"/>
-          </p:cNvSpPr>
-          <p:nvPr>
-            <p:ph type="dt" idx="10"/>
-          </p:nvPr>
-        </p:nvSpPr>
-        <p:spPr>
-          <a:xfrm>
-            <a:off x="10253345" y="6447981"/>
-            <a:ext cx="1313180" cy="247651"/>
-          </a:xfrm>
-          <a:prstGeom prst="rect">
-            <a:avLst/>
-          </a:prstGeom>
-          <a:noFill/>
-          <a:ln>
-            <a:noFill/>
-          </a:ln>
-        </p:spPr>
-        <p:txBody>
-          <a:bodyPr spcFirstLastPara="1" wrap="square" lIns="0" tIns="0" rIns="0" bIns="0" anchor="t" anchorCtr="0">
-            <a:noAutofit/>
-          </a:bodyPr>
-          <a:lstStyle/>
-          <a:p>
-            <a:pPr marL="0" lvl="0" indent="0" algn="r" rtl="0">
-              <a:spcBef>
-                <a:spcPts val="0"/>
-              </a:spcBef>
-              <a:spcAft>
-                <a:spcPts val="0"/>
-              </a:spcAft>
-              <a:buNone/>
-            </a:pPr>
-            <a:r>
-              <a:rPr lang="en-US" dirty="0">
-                <a:latin typeface="Libre Franklin"/>
-                <a:ea typeface="Libre Franklin"/>
-                <a:cs typeface="Libre Franklin"/>
-                <a:sym typeface="Libre Franklin"/>
-              </a:rPr>
-              <a:t> 5/6/2024</a:t>
-            </a:r>
-            <a:endParaRPr dirty="0">
-              <a:latin typeface="Libre Franklin"/>
-              <a:ea typeface="Libre Franklin"/>
-              <a:cs typeface="Libre Franklin"/>
-              <a:sym typeface="Libre Franklin"/>
-            </a:endParaRPr>
-          </a:p>
-        </p:txBody>
-      </p:sp>
-      <p:sp>
-        <p:nvSpPr>
           <p:cNvPr id="154" name="Google Shape;154;p3"/>
           <p:cNvSpPr txBox="1"/>
           <p:nvPr/>
@@ -14648,113 +14109,6 @@
       </p:grpSpPr>
       <p:sp>
         <p:nvSpPr>
-          <p:cNvPr id="307" name="Google Shape;307;p15"/>
-          <p:cNvSpPr txBox="1">
-            <a:spLocks noGrp="1"/>
-          </p:cNvSpPr>
-          <p:nvPr>
-            <p:ph type="sldNum" idx="12"/>
-          </p:nvPr>
-        </p:nvSpPr>
-        <p:spPr>
-          <a:xfrm>
-            <a:off x="5769610" y="6456044"/>
-            <a:ext cx="523240" cy="247651"/>
-          </a:xfrm>
-          <a:prstGeom prst="rect">
-            <a:avLst/>
-          </a:prstGeom>
-          <a:noFill/>
-          <a:ln>
-            <a:noFill/>
-          </a:ln>
-        </p:spPr>
-        <p:txBody>
-          <a:bodyPr spcFirstLastPara="1" wrap="square" lIns="0" tIns="0" rIns="0" bIns="0" anchor="t" anchorCtr="0">
-            <a:noAutofit/>
-          </a:bodyPr>
-          <a:lstStyle/>
-          <a:p>
-            <a:pPr marL="0" lvl="0" indent="0" algn="ctr" rtl="0">
-              <a:spcBef>
-                <a:spcPts val="0"/>
-              </a:spcBef>
-              <a:spcAft>
-                <a:spcPts val="0"/>
-              </a:spcAft>
-              <a:buNone/>
-            </a:pPr>
-            <a:fld id="{00000000-1234-1234-1234-123412341234}" type="slidenum">
-              <a:rPr lang="en-US"/>
-              <a:t>15</a:t>
-            </a:fld>
-            <a:endParaRPr dirty="0">
-              <a:latin typeface="Libre Franklin"/>
-              <a:ea typeface="Libre Franklin"/>
-              <a:cs typeface="Libre Franklin"/>
-              <a:sym typeface="Libre Franklin"/>
-            </a:endParaRPr>
-          </a:p>
-        </p:txBody>
-      </p:sp>
-      <p:sp>
-        <p:nvSpPr>
-          <p:cNvPr id="306" name="Google Shape;306;p15"/>
-          <p:cNvSpPr txBox="1">
-            <a:spLocks noGrp="1"/>
-          </p:cNvSpPr>
-          <p:nvPr>
-            <p:ph type="dt" idx="10"/>
-          </p:nvPr>
-        </p:nvSpPr>
-        <p:spPr>
-          <a:xfrm>
-            <a:off x="10154920" y="6456044"/>
-            <a:ext cx="1313180" cy="247651"/>
-          </a:xfrm>
-          <a:prstGeom prst="rect">
-            <a:avLst/>
-          </a:prstGeom>
-          <a:noFill/>
-          <a:ln>
-            <a:noFill/>
-          </a:ln>
-        </p:spPr>
-        <p:txBody>
-          <a:bodyPr spcFirstLastPara="1" wrap="square" lIns="0" tIns="0" rIns="0" bIns="0" anchor="t" anchorCtr="0">
-            <a:noAutofit/>
-          </a:bodyPr>
-          <a:lstStyle/>
-          <a:p>
-            <a:pPr marL="0" lvl="0" indent="0" algn="r" rtl="0">
-              <a:spcBef>
-                <a:spcPts val="0"/>
-              </a:spcBef>
-              <a:spcAft>
-                <a:spcPts val="0"/>
-              </a:spcAft>
-              <a:buNone/>
-            </a:pPr>
-            <a:r>
-              <a:rPr lang="en-US" dirty="0">
-                <a:latin typeface="Libre Franklin"/>
-                <a:ea typeface="Libre Franklin"/>
-                <a:cs typeface="Libre Franklin"/>
-                <a:sym typeface="Libre Franklin"/>
-              </a:rPr>
-              <a:t>5/6/2024</a:t>
-            </a:r>
-            <a:endParaRPr dirty="0">
-              <a:latin typeface="Libre Franklin"/>
-              <a:ea typeface="Libre Franklin"/>
-              <a:cs typeface="Libre Franklin"/>
-              <a:sym typeface="Libre Franklin"/>
-            </a:endParaRPr>
-          </a:p>
-        </p:txBody>
-      </p:sp>
-      <p:sp>
-        <p:nvSpPr>
           <p:cNvPr id="7" name="Google Shape;315;p16">
             <a:extLst>
               <a:ext uri="{FF2B5EF4-FFF2-40B4-BE49-F238E27FC236}">
@@ -15106,113 +14460,6 @@
           <a:chExt cx="0" cy="0"/>
         </a:xfrm>
       </p:grpSpPr>
-      <p:sp>
-        <p:nvSpPr>
-          <p:cNvPr id="307" name="Google Shape;307;p15"/>
-          <p:cNvSpPr txBox="1">
-            <a:spLocks noGrp="1"/>
-          </p:cNvSpPr>
-          <p:nvPr>
-            <p:ph type="sldNum" idx="12"/>
-          </p:nvPr>
-        </p:nvSpPr>
-        <p:spPr>
-          <a:xfrm>
-            <a:off x="5769610" y="6456044"/>
-            <a:ext cx="523240" cy="247651"/>
-          </a:xfrm>
-          <a:prstGeom prst="rect">
-            <a:avLst/>
-          </a:prstGeom>
-          <a:noFill/>
-          <a:ln>
-            <a:noFill/>
-          </a:ln>
-        </p:spPr>
-        <p:txBody>
-          <a:bodyPr spcFirstLastPara="1" wrap="square" lIns="0" tIns="0" rIns="0" bIns="0" anchor="t" anchorCtr="0">
-            <a:noAutofit/>
-          </a:bodyPr>
-          <a:lstStyle/>
-          <a:p>
-            <a:pPr marL="0" lvl="0" indent="0" algn="ctr" rtl="0">
-              <a:spcBef>
-                <a:spcPts val="0"/>
-              </a:spcBef>
-              <a:spcAft>
-                <a:spcPts val="0"/>
-              </a:spcAft>
-              <a:buNone/>
-            </a:pPr>
-            <a:fld id="{00000000-1234-1234-1234-123412341234}" type="slidenum">
-              <a:rPr lang="en-US"/>
-              <a:t>16</a:t>
-            </a:fld>
-            <a:endParaRPr dirty="0">
-              <a:latin typeface="Libre Franklin"/>
-              <a:ea typeface="Libre Franklin"/>
-              <a:cs typeface="Libre Franklin"/>
-              <a:sym typeface="Libre Franklin"/>
-            </a:endParaRPr>
-          </a:p>
-        </p:txBody>
-      </p:sp>
-      <p:sp>
-        <p:nvSpPr>
-          <p:cNvPr id="306" name="Google Shape;306;p15"/>
-          <p:cNvSpPr txBox="1">
-            <a:spLocks noGrp="1"/>
-          </p:cNvSpPr>
-          <p:nvPr>
-            <p:ph type="dt" idx="10"/>
-          </p:nvPr>
-        </p:nvSpPr>
-        <p:spPr>
-          <a:xfrm>
-            <a:off x="10154920" y="6456044"/>
-            <a:ext cx="1313180" cy="247651"/>
-          </a:xfrm>
-          <a:prstGeom prst="rect">
-            <a:avLst/>
-          </a:prstGeom>
-          <a:noFill/>
-          <a:ln>
-            <a:noFill/>
-          </a:ln>
-        </p:spPr>
-        <p:txBody>
-          <a:bodyPr spcFirstLastPara="1" wrap="square" lIns="0" tIns="0" rIns="0" bIns="0" anchor="t" anchorCtr="0">
-            <a:noAutofit/>
-          </a:bodyPr>
-          <a:lstStyle/>
-          <a:p>
-            <a:pPr marL="0" lvl="0" indent="0" algn="r" rtl="0">
-              <a:spcBef>
-                <a:spcPts val="0"/>
-              </a:spcBef>
-              <a:spcAft>
-                <a:spcPts val="0"/>
-              </a:spcAft>
-              <a:buNone/>
-            </a:pPr>
-            <a:r>
-              <a:rPr lang="en-US" dirty="0">
-                <a:latin typeface="Libre Franklin"/>
-                <a:ea typeface="Libre Franklin"/>
-                <a:cs typeface="Libre Franklin"/>
-                <a:sym typeface="Libre Franklin"/>
-              </a:rPr>
-              <a:t>5/6/2024</a:t>
-            </a:r>
-            <a:endParaRPr dirty="0">
-              <a:latin typeface="Libre Franklin"/>
-              <a:ea typeface="Libre Franklin"/>
-              <a:cs typeface="Libre Franklin"/>
-              <a:sym typeface="Libre Franklin"/>
-            </a:endParaRPr>
-          </a:p>
-        </p:txBody>
-      </p:sp>
       <p:sp>
         <p:nvSpPr>
           <p:cNvPr id="7" name="Google Shape;315;p16">
@@ -15703,113 +14950,6 @@
             <a:endParaRPr sz="4000" dirty="0">
               <a:latin typeface="Times New Roman" panose="02020603050405020304" pitchFamily="18" charset="0"/>
               <a:cs typeface="Times New Roman" panose="02020603050405020304" pitchFamily="18" charset="0"/>
-            </a:endParaRPr>
-          </a:p>
-        </p:txBody>
-      </p:sp>
-      <p:sp>
-        <p:nvSpPr>
-          <p:cNvPr id="153" name="Google Shape;153;p3"/>
-          <p:cNvSpPr txBox="1">
-            <a:spLocks noGrp="1"/>
-          </p:cNvSpPr>
-          <p:nvPr>
-            <p:ph type="sldNum" idx="12"/>
-          </p:nvPr>
-        </p:nvSpPr>
-        <p:spPr>
-          <a:xfrm>
-            <a:off x="5818505" y="6447982"/>
-            <a:ext cx="523240" cy="247651"/>
-          </a:xfrm>
-          <a:prstGeom prst="rect">
-            <a:avLst/>
-          </a:prstGeom>
-          <a:noFill/>
-          <a:ln>
-            <a:noFill/>
-          </a:ln>
-        </p:spPr>
-        <p:txBody>
-          <a:bodyPr spcFirstLastPara="1" wrap="square" lIns="0" tIns="0" rIns="0" bIns="0" anchor="t" anchorCtr="0">
-            <a:noAutofit/>
-          </a:bodyPr>
-          <a:lstStyle/>
-          <a:p>
-            <a:pPr marL="0" lvl="0" indent="0" algn="ctr" rtl="0">
-              <a:spcBef>
-                <a:spcPts val="0"/>
-              </a:spcBef>
-              <a:spcAft>
-                <a:spcPts val="0"/>
-              </a:spcAft>
-              <a:buNone/>
-            </a:pPr>
-            <a:r>
-              <a:rPr lang="en-US" dirty="0"/>
-              <a:t>3</a:t>
-            </a:r>
-            <a:endParaRPr dirty="0">
-              <a:latin typeface="Libre Franklin"/>
-              <a:ea typeface="Libre Franklin"/>
-              <a:cs typeface="Libre Franklin"/>
-              <a:sym typeface="Libre Franklin"/>
-            </a:endParaRPr>
-          </a:p>
-        </p:txBody>
-      </p:sp>
-      <p:sp>
-        <p:nvSpPr>
-          <p:cNvPr id="152" name="Google Shape;152;p3"/>
-          <p:cNvSpPr txBox="1">
-            <a:spLocks noGrp="1"/>
-          </p:cNvSpPr>
-          <p:nvPr>
-            <p:ph type="dt" idx="10"/>
-          </p:nvPr>
-        </p:nvSpPr>
-        <p:spPr>
-          <a:xfrm>
-            <a:off x="10253345" y="6447981"/>
-            <a:ext cx="1313180" cy="247651"/>
-          </a:xfrm>
-          <a:prstGeom prst="rect">
-            <a:avLst/>
-          </a:prstGeom>
-          <a:noFill/>
-          <a:ln>
-            <a:noFill/>
-          </a:ln>
-        </p:spPr>
-        <p:txBody>
-          <a:bodyPr spcFirstLastPara="1" wrap="square" lIns="0" tIns="0" rIns="0" bIns="0" anchor="t" anchorCtr="0">
-            <a:noAutofit/>
-          </a:bodyPr>
-          <a:lstStyle/>
-          <a:p>
-            <a:pPr marL="0" lvl="0" indent="0" algn="r" rtl="0">
-              <a:spcBef>
-                <a:spcPts val="0"/>
-              </a:spcBef>
-              <a:spcAft>
-                <a:spcPts val="0"/>
-              </a:spcAft>
-              <a:buNone/>
-            </a:pPr>
-            <a:r>
-              <a:rPr lang="en-US" dirty="0">
-                <a:latin typeface="Libre Franklin"/>
-                <a:ea typeface="Libre Franklin"/>
-                <a:cs typeface="Libre Franklin"/>
-                <a:sym typeface="Libre Franklin"/>
-              </a:rPr>
-              <a:t> 5/6/2024</a:t>
-            </a:r>
-            <a:endParaRPr dirty="0">
-              <a:latin typeface="Libre Franklin"/>
-              <a:ea typeface="Libre Franklin"/>
-              <a:cs typeface="Libre Franklin"/>
-              <a:sym typeface="Libre Franklin"/>
             </a:endParaRPr>
           </a:p>
         </p:txBody>
@@ -16344,113 +15484,6 @@
             <a:endParaRPr sz="4000" dirty="0">
               <a:latin typeface="Times New Roman" panose="02020603050405020304" pitchFamily="18" charset="0"/>
               <a:cs typeface="Times New Roman" panose="02020603050405020304" pitchFamily="18" charset="0"/>
-            </a:endParaRPr>
-          </a:p>
-        </p:txBody>
-      </p:sp>
-      <p:sp>
-        <p:nvSpPr>
-          <p:cNvPr id="153" name="Google Shape;153;p3"/>
-          <p:cNvSpPr txBox="1">
-            <a:spLocks noGrp="1"/>
-          </p:cNvSpPr>
-          <p:nvPr>
-            <p:ph type="sldNum" idx="12"/>
-          </p:nvPr>
-        </p:nvSpPr>
-        <p:spPr>
-          <a:xfrm>
-            <a:off x="5818505" y="6447982"/>
-            <a:ext cx="523240" cy="247651"/>
-          </a:xfrm>
-          <a:prstGeom prst="rect">
-            <a:avLst/>
-          </a:prstGeom>
-          <a:noFill/>
-          <a:ln>
-            <a:noFill/>
-          </a:ln>
-        </p:spPr>
-        <p:txBody>
-          <a:bodyPr spcFirstLastPara="1" wrap="square" lIns="0" tIns="0" rIns="0" bIns="0" anchor="t" anchorCtr="0">
-            <a:noAutofit/>
-          </a:bodyPr>
-          <a:lstStyle/>
-          <a:p>
-            <a:pPr marL="0" lvl="0" indent="0" algn="ctr" rtl="0">
-              <a:spcBef>
-                <a:spcPts val="0"/>
-              </a:spcBef>
-              <a:spcAft>
-                <a:spcPts val="0"/>
-              </a:spcAft>
-              <a:buNone/>
-            </a:pPr>
-            <a:r>
-              <a:rPr lang="en-US" dirty="0"/>
-              <a:t>3</a:t>
-            </a:r>
-            <a:endParaRPr dirty="0">
-              <a:latin typeface="Libre Franklin"/>
-              <a:ea typeface="Libre Franklin"/>
-              <a:cs typeface="Libre Franklin"/>
-              <a:sym typeface="Libre Franklin"/>
-            </a:endParaRPr>
-          </a:p>
-        </p:txBody>
-      </p:sp>
-      <p:sp>
-        <p:nvSpPr>
-          <p:cNvPr id="152" name="Google Shape;152;p3"/>
-          <p:cNvSpPr txBox="1">
-            <a:spLocks noGrp="1"/>
-          </p:cNvSpPr>
-          <p:nvPr>
-            <p:ph type="dt" idx="10"/>
-          </p:nvPr>
-        </p:nvSpPr>
-        <p:spPr>
-          <a:xfrm>
-            <a:off x="10253345" y="6447981"/>
-            <a:ext cx="1313180" cy="247651"/>
-          </a:xfrm>
-          <a:prstGeom prst="rect">
-            <a:avLst/>
-          </a:prstGeom>
-          <a:noFill/>
-          <a:ln>
-            <a:noFill/>
-          </a:ln>
-        </p:spPr>
-        <p:txBody>
-          <a:bodyPr spcFirstLastPara="1" wrap="square" lIns="0" tIns="0" rIns="0" bIns="0" anchor="t" anchorCtr="0">
-            <a:noAutofit/>
-          </a:bodyPr>
-          <a:lstStyle/>
-          <a:p>
-            <a:pPr marL="0" lvl="0" indent="0" algn="r" rtl="0">
-              <a:spcBef>
-                <a:spcPts val="0"/>
-              </a:spcBef>
-              <a:spcAft>
-                <a:spcPts val="0"/>
-              </a:spcAft>
-              <a:buNone/>
-            </a:pPr>
-            <a:r>
-              <a:rPr lang="en-US" dirty="0">
-                <a:latin typeface="Libre Franklin"/>
-                <a:ea typeface="Libre Franklin"/>
-                <a:cs typeface="Libre Franklin"/>
-                <a:sym typeface="Libre Franklin"/>
-              </a:rPr>
-              <a:t> 5/6/2024</a:t>
-            </a:r>
-            <a:endParaRPr dirty="0">
-              <a:latin typeface="Libre Franklin"/>
-              <a:ea typeface="Libre Franklin"/>
-              <a:cs typeface="Libre Franklin"/>
-              <a:sym typeface="Libre Franklin"/>
             </a:endParaRPr>
           </a:p>
         </p:txBody>
@@ -16934,113 +15967,6 @@
       </p:sp>
       <p:sp>
         <p:nvSpPr>
-          <p:cNvPr id="153" name="Google Shape;153;p3"/>
-          <p:cNvSpPr txBox="1">
-            <a:spLocks noGrp="1"/>
-          </p:cNvSpPr>
-          <p:nvPr>
-            <p:ph type="sldNum" idx="12"/>
-          </p:nvPr>
-        </p:nvSpPr>
-        <p:spPr>
-          <a:xfrm>
-            <a:off x="5818505" y="6447982"/>
-            <a:ext cx="523240" cy="247651"/>
-          </a:xfrm>
-          <a:prstGeom prst="rect">
-            <a:avLst/>
-          </a:prstGeom>
-          <a:noFill/>
-          <a:ln>
-            <a:noFill/>
-          </a:ln>
-        </p:spPr>
-        <p:txBody>
-          <a:bodyPr spcFirstLastPara="1" wrap="square" lIns="0" tIns="0" rIns="0" bIns="0" anchor="t" anchorCtr="0">
-            <a:noAutofit/>
-          </a:bodyPr>
-          <a:lstStyle/>
-          <a:p>
-            <a:pPr marL="0" lvl="0" indent="0" algn="ctr" rtl="0">
-              <a:spcBef>
-                <a:spcPts val="0"/>
-              </a:spcBef>
-              <a:spcAft>
-                <a:spcPts val="0"/>
-              </a:spcAft>
-              <a:buNone/>
-            </a:pPr>
-            <a:r>
-              <a:rPr lang="en-US" dirty="0"/>
-              <a:t>3</a:t>
-            </a:r>
-            <a:endParaRPr dirty="0">
-              <a:latin typeface="Libre Franklin"/>
-              <a:ea typeface="Libre Franklin"/>
-              <a:cs typeface="Libre Franklin"/>
-              <a:sym typeface="Libre Franklin"/>
-            </a:endParaRPr>
-          </a:p>
-        </p:txBody>
-      </p:sp>
-      <p:sp>
-        <p:nvSpPr>
-          <p:cNvPr id="152" name="Google Shape;152;p3"/>
-          <p:cNvSpPr txBox="1">
-            <a:spLocks noGrp="1"/>
-          </p:cNvSpPr>
-          <p:nvPr>
-            <p:ph type="dt" idx="10"/>
-          </p:nvPr>
-        </p:nvSpPr>
-        <p:spPr>
-          <a:xfrm>
-            <a:off x="10253345" y="6447981"/>
-            <a:ext cx="1313180" cy="247651"/>
-          </a:xfrm>
-          <a:prstGeom prst="rect">
-            <a:avLst/>
-          </a:prstGeom>
-          <a:noFill/>
-          <a:ln>
-            <a:noFill/>
-          </a:ln>
-        </p:spPr>
-        <p:txBody>
-          <a:bodyPr spcFirstLastPara="1" wrap="square" lIns="0" tIns="0" rIns="0" bIns="0" anchor="t" anchorCtr="0">
-            <a:noAutofit/>
-          </a:bodyPr>
-          <a:lstStyle/>
-          <a:p>
-            <a:pPr marL="0" lvl="0" indent="0" algn="r" rtl="0">
-              <a:spcBef>
-                <a:spcPts val="0"/>
-              </a:spcBef>
-              <a:spcAft>
-                <a:spcPts val="0"/>
-              </a:spcAft>
-              <a:buNone/>
-            </a:pPr>
-            <a:r>
-              <a:rPr lang="en-US" dirty="0">
-                <a:latin typeface="Libre Franklin"/>
-                <a:ea typeface="Libre Franklin"/>
-                <a:cs typeface="Libre Franklin"/>
-                <a:sym typeface="Libre Franklin"/>
-              </a:rPr>
-              <a:t> 5/6/2024</a:t>
-            </a:r>
-            <a:endParaRPr dirty="0">
-              <a:latin typeface="Libre Franklin"/>
-              <a:ea typeface="Libre Franklin"/>
-              <a:cs typeface="Libre Franklin"/>
-              <a:sym typeface="Libre Franklin"/>
-            </a:endParaRPr>
-          </a:p>
-        </p:txBody>
-      </p:sp>
-      <p:sp>
-        <p:nvSpPr>
           <p:cNvPr id="154" name="Google Shape;154;p3"/>
           <p:cNvSpPr txBox="1"/>
           <p:nvPr/>
@@ -17741,113 +16667,6 @@
             <a:endParaRPr sz="4000" dirty="0">
               <a:latin typeface="Times New Roman" panose="02020603050405020304" pitchFamily="18" charset="0"/>
               <a:cs typeface="Times New Roman" panose="02020603050405020304" pitchFamily="18" charset="0"/>
-            </a:endParaRPr>
-          </a:p>
-        </p:txBody>
-      </p:sp>
-      <p:sp>
-        <p:nvSpPr>
-          <p:cNvPr id="153" name="Google Shape;153;p3"/>
-          <p:cNvSpPr txBox="1">
-            <a:spLocks noGrp="1"/>
-          </p:cNvSpPr>
-          <p:nvPr>
-            <p:ph type="sldNum" idx="12"/>
-          </p:nvPr>
-        </p:nvSpPr>
-        <p:spPr>
-          <a:xfrm>
-            <a:off x="5818505" y="6447982"/>
-            <a:ext cx="523240" cy="247651"/>
-          </a:xfrm>
-          <a:prstGeom prst="rect">
-            <a:avLst/>
-          </a:prstGeom>
-          <a:noFill/>
-          <a:ln>
-            <a:noFill/>
-          </a:ln>
-        </p:spPr>
-        <p:txBody>
-          <a:bodyPr spcFirstLastPara="1" wrap="square" lIns="0" tIns="0" rIns="0" bIns="0" anchor="t" anchorCtr="0">
-            <a:noAutofit/>
-          </a:bodyPr>
-          <a:lstStyle/>
-          <a:p>
-            <a:pPr marL="0" lvl="0" indent="0" algn="ctr" rtl="0">
-              <a:spcBef>
-                <a:spcPts val="0"/>
-              </a:spcBef>
-              <a:spcAft>
-                <a:spcPts val="0"/>
-              </a:spcAft>
-              <a:buNone/>
-            </a:pPr>
-            <a:r>
-              <a:rPr lang="en-US" dirty="0"/>
-              <a:t>3</a:t>
-            </a:r>
-            <a:endParaRPr dirty="0">
-              <a:latin typeface="Libre Franklin"/>
-              <a:ea typeface="Libre Franklin"/>
-              <a:cs typeface="Libre Franklin"/>
-              <a:sym typeface="Libre Franklin"/>
-            </a:endParaRPr>
-          </a:p>
-        </p:txBody>
-      </p:sp>
-      <p:sp>
-        <p:nvSpPr>
-          <p:cNvPr id="152" name="Google Shape;152;p3"/>
-          <p:cNvSpPr txBox="1">
-            <a:spLocks noGrp="1"/>
-          </p:cNvSpPr>
-          <p:nvPr>
-            <p:ph type="dt" idx="10"/>
-          </p:nvPr>
-        </p:nvSpPr>
-        <p:spPr>
-          <a:xfrm>
-            <a:off x="10253345" y="6447981"/>
-            <a:ext cx="1313180" cy="247651"/>
-          </a:xfrm>
-          <a:prstGeom prst="rect">
-            <a:avLst/>
-          </a:prstGeom>
-          <a:noFill/>
-          <a:ln>
-            <a:noFill/>
-          </a:ln>
-        </p:spPr>
-        <p:txBody>
-          <a:bodyPr spcFirstLastPara="1" wrap="square" lIns="0" tIns="0" rIns="0" bIns="0" anchor="t" anchorCtr="0">
-            <a:noAutofit/>
-          </a:bodyPr>
-          <a:lstStyle/>
-          <a:p>
-            <a:pPr marL="0" lvl="0" indent="0" algn="r" rtl="0">
-              <a:spcBef>
-                <a:spcPts val="0"/>
-              </a:spcBef>
-              <a:spcAft>
-                <a:spcPts val="0"/>
-              </a:spcAft>
-              <a:buNone/>
-            </a:pPr>
-            <a:r>
-              <a:rPr lang="en-US" dirty="0">
-                <a:latin typeface="Libre Franklin"/>
-                <a:ea typeface="Libre Franklin"/>
-                <a:cs typeface="Libre Franklin"/>
-                <a:sym typeface="Libre Franklin"/>
-              </a:rPr>
-              <a:t> 5/6/2024</a:t>
-            </a:r>
-            <a:endParaRPr dirty="0">
-              <a:latin typeface="Libre Franklin"/>
-              <a:ea typeface="Libre Franklin"/>
-              <a:cs typeface="Libre Franklin"/>
-              <a:sym typeface="Libre Franklin"/>
             </a:endParaRPr>
           </a:p>
         </p:txBody>
@@ -18034,113 +16853,6 @@
             <a:endParaRPr sz="4000" dirty="0">
               <a:latin typeface="Times New Roman" panose="02020603050405020304" pitchFamily="18" charset="0"/>
               <a:cs typeface="Times New Roman" panose="02020603050405020304" pitchFamily="18" charset="0"/>
-            </a:endParaRPr>
-          </a:p>
-        </p:txBody>
-      </p:sp>
-      <p:sp>
-        <p:nvSpPr>
-          <p:cNvPr id="153" name="Google Shape;153;p3"/>
-          <p:cNvSpPr txBox="1">
-            <a:spLocks noGrp="1"/>
-          </p:cNvSpPr>
-          <p:nvPr>
-            <p:ph type="sldNum" idx="12"/>
-          </p:nvPr>
-        </p:nvSpPr>
-        <p:spPr>
-          <a:xfrm>
-            <a:off x="5818505" y="6447982"/>
-            <a:ext cx="523240" cy="247651"/>
-          </a:xfrm>
-          <a:prstGeom prst="rect">
-            <a:avLst/>
-          </a:prstGeom>
-          <a:noFill/>
-          <a:ln>
-            <a:noFill/>
-          </a:ln>
-        </p:spPr>
-        <p:txBody>
-          <a:bodyPr spcFirstLastPara="1" wrap="square" lIns="0" tIns="0" rIns="0" bIns="0" anchor="t" anchorCtr="0">
-            <a:noAutofit/>
-          </a:bodyPr>
-          <a:lstStyle/>
-          <a:p>
-            <a:pPr marL="0" lvl="0" indent="0" algn="ctr" rtl="0">
-              <a:spcBef>
-                <a:spcPts val="0"/>
-              </a:spcBef>
-              <a:spcAft>
-                <a:spcPts val="0"/>
-              </a:spcAft>
-              <a:buNone/>
-            </a:pPr>
-            <a:r>
-              <a:rPr lang="en-US" dirty="0"/>
-              <a:t>3</a:t>
-            </a:r>
-            <a:endParaRPr dirty="0">
-              <a:latin typeface="Libre Franklin"/>
-              <a:ea typeface="Libre Franklin"/>
-              <a:cs typeface="Libre Franklin"/>
-              <a:sym typeface="Libre Franklin"/>
-            </a:endParaRPr>
-          </a:p>
-        </p:txBody>
-      </p:sp>
-      <p:sp>
-        <p:nvSpPr>
-          <p:cNvPr id="152" name="Google Shape;152;p3"/>
-          <p:cNvSpPr txBox="1">
-            <a:spLocks noGrp="1"/>
-          </p:cNvSpPr>
-          <p:nvPr>
-            <p:ph type="dt" idx="10"/>
-          </p:nvPr>
-        </p:nvSpPr>
-        <p:spPr>
-          <a:xfrm>
-            <a:off x="10253345" y="6447981"/>
-            <a:ext cx="1313180" cy="247651"/>
-          </a:xfrm>
-          <a:prstGeom prst="rect">
-            <a:avLst/>
-          </a:prstGeom>
-          <a:noFill/>
-          <a:ln>
-            <a:noFill/>
-          </a:ln>
-        </p:spPr>
-        <p:txBody>
-          <a:bodyPr spcFirstLastPara="1" wrap="square" lIns="0" tIns="0" rIns="0" bIns="0" anchor="t" anchorCtr="0">
-            <a:noAutofit/>
-          </a:bodyPr>
-          <a:lstStyle/>
-          <a:p>
-            <a:pPr marL="0" lvl="0" indent="0" algn="r" rtl="0">
-              <a:spcBef>
-                <a:spcPts val="0"/>
-              </a:spcBef>
-              <a:spcAft>
-                <a:spcPts val="0"/>
-              </a:spcAft>
-              <a:buNone/>
-            </a:pPr>
-            <a:r>
-              <a:rPr lang="en-US" dirty="0">
-                <a:latin typeface="Libre Franklin"/>
-                <a:ea typeface="Libre Franklin"/>
-                <a:cs typeface="Libre Franklin"/>
-                <a:sym typeface="Libre Franklin"/>
-              </a:rPr>
-              <a:t> 5/6/2024</a:t>
-            </a:r>
-            <a:endParaRPr dirty="0">
-              <a:latin typeface="Libre Franklin"/>
-              <a:ea typeface="Libre Franklin"/>
-              <a:cs typeface="Libre Franklin"/>
-              <a:sym typeface="Libre Franklin"/>
             </a:endParaRPr>
           </a:p>
         </p:txBody>
@@ -19130,113 +17842,6 @@
       </p:sp>
       <p:sp>
         <p:nvSpPr>
-          <p:cNvPr id="153" name="Google Shape;153;p3"/>
-          <p:cNvSpPr txBox="1">
-            <a:spLocks noGrp="1"/>
-          </p:cNvSpPr>
-          <p:nvPr>
-            <p:ph type="sldNum" idx="12"/>
-          </p:nvPr>
-        </p:nvSpPr>
-        <p:spPr>
-          <a:xfrm>
-            <a:off x="5818505" y="6447982"/>
-            <a:ext cx="523240" cy="247651"/>
-          </a:xfrm>
-          <a:prstGeom prst="rect">
-            <a:avLst/>
-          </a:prstGeom>
-          <a:noFill/>
-          <a:ln>
-            <a:noFill/>
-          </a:ln>
-        </p:spPr>
-        <p:txBody>
-          <a:bodyPr spcFirstLastPara="1" wrap="square" lIns="0" tIns="0" rIns="0" bIns="0" anchor="t" anchorCtr="0">
-            <a:noAutofit/>
-          </a:bodyPr>
-          <a:lstStyle/>
-          <a:p>
-            <a:pPr marL="0" lvl="0" indent="0" algn="ctr" rtl="0">
-              <a:spcBef>
-                <a:spcPts val="0"/>
-              </a:spcBef>
-              <a:spcAft>
-                <a:spcPts val="0"/>
-              </a:spcAft>
-              <a:buNone/>
-            </a:pPr>
-            <a:r>
-              <a:rPr lang="en-US" dirty="0"/>
-              <a:t>3</a:t>
-            </a:r>
-            <a:endParaRPr dirty="0">
-              <a:latin typeface="Libre Franklin"/>
-              <a:ea typeface="Libre Franklin"/>
-              <a:cs typeface="Libre Franklin"/>
-              <a:sym typeface="Libre Franklin"/>
-            </a:endParaRPr>
-          </a:p>
-        </p:txBody>
-      </p:sp>
-      <p:sp>
-        <p:nvSpPr>
-          <p:cNvPr id="152" name="Google Shape;152;p3"/>
-          <p:cNvSpPr txBox="1">
-            <a:spLocks noGrp="1"/>
-          </p:cNvSpPr>
-          <p:nvPr>
-            <p:ph type="dt" idx="10"/>
-          </p:nvPr>
-        </p:nvSpPr>
-        <p:spPr>
-          <a:xfrm>
-            <a:off x="10253345" y="6447981"/>
-            <a:ext cx="1313180" cy="247651"/>
-          </a:xfrm>
-          <a:prstGeom prst="rect">
-            <a:avLst/>
-          </a:prstGeom>
-          <a:noFill/>
-          <a:ln>
-            <a:noFill/>
-          </a:ln>
-        </p:spPr>
-        <p:txBody>
-          <a:bodyPr spcFirstLastPara="1" wrap="square" lIns="0" tIns="0" rIns="0" bIns="0" anchor="t" anchorCtr="0">
-            <a:noAutofit/>
-          </a:bodyPr>
-          <a:lstStyle/>
-          <a:p>
-            <a:pPr marL="0" lvl="0" indent="0" algn="r" rtl="0">
-              <a:spcBef>
-                <a:spcPts val="0"/>
-              </a:spcBef>
-              <a:spcAft>
-                <a:spcPts val="0"/>
-              </a:spcAft>
-              <a:buNone/>
-            </a:pPr>
-            <a:r>
-              <a:rPr lang="en-US" dirty="0">
-                <a:latin typeface="Libre Franklin"/>
-                <a:ea typeface="Libre Franklin"/>
-                <a:cs typeface="Libre Franklin"/>
-                <a:sym typeface="Libre Franklin"/>
-              </a:rPr>
-              <a:t> 5/6/2024</a:t>
-            </a:r>
-            <a:endParaRPr dirty="0">
-              <a:latin typeface="Libre Franklin"/>
-              <a:ea typeface="Libre Franklin"/>
-              <a:cs typeface="Libre Franklin"/>
-              <a:sym typeface="Libre Franklin"/>
-            </a:endParaRPr>
-          </a:p>
-        </p:txBody>
-      </p:sp>
-      <p:sp>
-        <p:nvSpPr>
           <p:cNvPr id="154" name="Google Shape;154;p3"/>
           <p:cNvSpPr txBox="1"/>
           <p:nvPr/>
@@ -19952,113 +18557,6 @@
       </p:sp>
       <p:sp>
         <p:nvSpPr>
-          <p:cNvPr id="153" name="Google Shape;153;p3"/>
-          <p:cNvSpPr txBox="1">
-            <a:spLocks noGrp="1"/>
-          </p:cNvSpPr>
-          <p:nvPr>
-            <p:ph type="sldNum" idx="12"/>
-          </p:nvPr>
-        </p:nvSpPr>
-        <p:spPr>
-          <a:xfrm>
-            <a:off x="5818505" y="6447982"/>
-            <a:ext cx="523240" cy="247651"/>
-          </a:xfrm>
-          <a:prstGeom prst="rect">
-            <a:avLst/>
-          </a:prstGeom>
-          <a:noFill/>
-          <a:ln>
-            <a:noFill/>
-          </a:ln>
-        </p:spPr>
-        <p:txBody>
-          <a:bodyPr spcFirstLastPara="1" wrap="square" lIns="0" tIns="0" rIns="0" bIns="0" anchor="t" anchorCtr="0">
-            <a:noAutofit/>
-          </a:bodyPr>
-          <a:lstStyle/>
-          <a:p>
-            <a:pPr marL="0" lvl="0" indent="0" algn="ctr" rtl="0">
-              <a:spcBef>
-                <a:spcPts val="0"/>
-              </a:spcBef>
-              <a:spcAft>
-                <a:spcPts val="0"/>
-              </a:spcAft>
-              <a:buNone/>
-            </a:pPr>
-            <a:r>
-              <a:rPr lang="en-US" dirty="0"/>
-              <a:t>3</a:t>
-            </a:r>
-            <a:endParaRPr dirty="0">
-              <a:latin typeface="Libre Franklin"/>
-              <a:ea typeface="Libre Franklin"/>
-              <a:cs typeface="Libre Franklin"/>
-              <a:sym typeface="Libre Franklin"/>
-            </a:endParaRPr>
-          </a:p>
-        </p:txBody>
-      </p:sp>
-      <p:sp>
-        <p:nvSpPr>
-          <p:cNvPr id="152" name="Google Shape;152;p3"/>
-          <p:cNvSpPr txBox="1">
-            <a:spLocks noGrp="1"/>
-          </p:cNvSpPr>
-          <p:nvPr>
-            <p:ph type="dt" idx="10"/>
-          </p:nvPr>
-        </p:nvSpPr>
-        <p:spPr>
-          <a:xfrm>
-            <a:off x="10253345" y="6447981"/>
-            <a:ext cx="1313180" cy="247651"/>
-          </a:xfrm>
-          <a:prstGeom prst="rect">
-            <a:avLst/>
-          </a:prstGeom>
-          <a:noFill/>
-          <a:ln>
-            <a:noFill/>
-          </a:ln>
-        </p:spPr>
-        <p:txBody>
-          <a:bodyPr spcFirstLastPara="1" wrap="square" lIns="0" tIns="0" rIns="0" bIns="0" anchor="t" anchorCtr="0">
-            <a:noAutofit/>
-          </a:bodyPr>
-          <a:lstStyle/>
-          <a:p>
-            <a:pPr marL="0" lvl="0" indent="0" algn="r" rtl="0">
-              <a:spcBef>
-                <a:spcPts val="0"/>
-              </a:spcBef>
-              <a:spcAft>
-                <a:spcPts val="0"/>
-              </a:spcAft>
-              <a:buNone/>
-            </a:pPr>
-            <a:r>
-              <a:rPr lang="en-US" dirty="0">
-                <a:latin typeface="Libre Franklin"/>
-                <a:ea typeface="Libre Franklin"/>
-                <a:cs typeface="Libre Franklin"/>
-                <a:sym typeface="Libre Franklin"/>
-              </a:rPr>
-              <a:t> 5/6/2024</a:t>
-            </a:r>
-            <a:endParaRPr dirty="0">
-              <a:latin typeface="Libre Franklin"/>
-              <a:ea typeface="Libre Franklin"/>
-              <a:cs typeface="Libre Franklin"/>
-              <a:sym typeface="Libre Franklin"/>
-            </a:endParaRPr>
-          </a:p>
-        </p:txBody>
-      </p:sp>
-      <p:sp>
-        <p:nvSpPr>
           <p:cNvPr id="154" name="Google Shape;154;p3"/>
           <p:cNvSpPr txBox="1"/>
           <p:nvPr/>
@@ -20756,113 +19254,6 @@
             <a:endParaRPr sz="4000" dirty="0">
               <a:latin typeface="Times New Roman" panose="02020603050405020304" pitchFamily="18" charset="0"/>
               <a:cs typeface="Times New Roman" panose="02020603050405020304" pitchFamily="18" charset="0"/>
-            </a:endParaRPr>
-          </a:p>
-        </p:txBody>
-      </p:sp>
-      <p:sp>
-        <p:nvSpPr>
-          <p:cNvPr id="153" name="Google Shape;153;p3"/>
-          <p:cNvSpPr txBox="1">
-            <a:spLocks noGrp="1"/>
-          </p:cNvSpPr>
-          <p:nvPr>
-            <p:ph type="sldNum" idx="12"/>
-          </p:nvPr>
-        </p:nvSpPr>
-        <p:spPr>
-          <a:xfrm>
-            <a:off x="5818505" y="6447982"/>
-            <a:ext cx="523240" cy="247651"/>
-          </a:xfrm>
-          <a:prstGeom prst="rect">
-            <a:avLst/>
-          </a:prstGeom>
-          <a:noFill/>
-          <a:ln>
-            <a:noFill/>
-          </a:ln>
-        </p:spPr>
-        <p:txBody>
-          <a:bodyPr spcFirstLastPara="1" wrap="square" lIns="0" tIns="0" rIns="0" bIns="0" anchor="t" anchorCtr="0">
-            <a:noAutofit/>
-          </a:bodyPr>
-          <a:lstStyle/>
-          <a:p>
-            <a:pPr marL="0" lvl="0" indent="0" algn="ctr" rtl="0">
-              <a:spcBef>
-                <a:spcPts val="0"/>
-              </a:spcBef>
-              <a:spcAft>
-                <a:spcPts val="0"/>
-              </a:spcAft>
-              <a:buNone/>
-            </a:pPr>
-            <a:r>
-              <a:rPr lang="en-US" dirty="0"/>
-              <a:t>3</a:t>
-            </a:r>
-            <a:endParaRPr dirty="0">
-              <a:latin typeface="Libre Franklin"/>
-              <a:ea typeface="Libre Franklin"/>
-              <a:cs typeface="Libre Franklin"/>
-              <a:sym typeface="Libre Franklin"/>
-            </a:endParaRPr>
-          </a:p>
-        </p:txBody>
-      </p:sp>
-      <p:sp>
-        <p:nvSpPr>
-          <p:cNvPr id="152" name="Google Shape;152;p3"/>
-          <p:cNvSpPr txBox="1">
-            <a:spLocks noGrp="1"/>
-          </p:cNvSpPr>
-          <p:nvPr>
-            <p:ph type="dt" idx="10"/>
-          </p:nvPr>
-        </p:nvSpPr>
-        <p:spPr>
-          <a:xfrm>
-            <a:off x="10253345" y="6447981"/>
-            <a:ext cx="1313180" cy="247651"/>
-          </a:xfrm>
-          <a:prstGeom prst="rect">
-            <a:avLst/>
-          </a:prstGeom>
-          <a:noFill/>
-          <a:ln>
-            <a:noFill/>
-          </a:ln>
-        </p:spPr>
-        <p:txBody>
-          <a:bodyPr spcFirstLastPara="1" wrap="square" lIns="0" tIns="0" rIns="0" bIns="0" anchor="t" anchorCtr="0">
-            <a:noAutofit/>
-          </a:bodyPr>
-          <a:lstStyle/>
-          <a:p>
-            <a:pPr marL="0" lvl="0" indent="0" algn="r" rtl="0">
-              <a:spcBef>
-                <a:spcPts val="0"/>
-              </a:spcBef>
-              <a:spcAft>
-                <a:spcPts val="0"/>
-              </a:spcAft>
-              <a:buNone/>
-            </a:pPr>
-            <a:r>
-              <a:rPr lang="en-US" dirty="0">
-                <a:latin typeface="Libre Franklin"/>
-                <a:ea typeface="Libre Franklin"/>
-                <a:cs typeface="Libre Franklin"/>
-                <a:sym typeface="Libre Franklin"/>
-              </a:rPr>
-              <a:t> 5/6/2024</a:t>
-            </a:r>
-            <a:endParaRPr dirty="0">
-              <a:latin typeface="Libre Franklin"/>
-              <a:ea typeface="Libre Franklin"/>
-              <a:cs typeface="Libre Franklin"/>
-              <a:sym typeface="Libre Franklin"/>
             </a:endParaRPr>
           </a:p>
         </p:txBody>
